--- a/public/fun/pack/pptx/family/가족소개_14_나혼자·1인가구_장마철우산.pptx
+++ b/public/fun/pack/pptx/family/가족소개_14_나혼자·1인가구_장마철우산.pptx
@@ -3347,7 +3347,7 @@
             <a:r>
               <a:rPr sz="3600" b="1" i="0">
                 <a:solidFill>
-                  <a:srgbClr val="19294D"/>
+                  <a:srgbClr val="11285F"/>
                 </a:solidFill>
               </a:rPr>
               <a:t>우리 가족을 소개합니다</a:t>
@@ -3385,7 +3385,7 @@
             <a:r>
               <a:rPr sz="1700" b="0" i="1">
                 <a:solidFill>
-                  <a:srgbClr val="19294D"/>
+                  <a:srgbClr val="11285F"/>
                 </a:solidFill>
               </a:rPr>
               <a:t>퇴근길 장마에 우산 하나 사 들고</a:t>
@@ -3445,7 +3445,7 @@
     <p:bg>
       <p:bgPr>
         <a:solidFill>
-          <a:srgbClr val="F0F3FA"/>
+          <a:srgbClr val="EEF2FC"/>
         </a:solidFill>
         <a:effectLst/>
       </p:bgPr>
@@ -3472,7 +3472,7 @@
             <a:avLst/>
           </a:prstGeom>
           <a:solidFill>
-            <a:srgbClr val="335299"/>
+            <a:srgbClr val="2655C5"/>
           </a:solidFill>
           <a:ln>
             <a:noFill/>
@@ -3501,7 +3501,7 @@
             <a:avLst/>
           </a:prstGeom>
           <a:solidFill>
-            <a:srgbClr val="914C3B"/>
+            <a:srgbClr val="209DB6"/>
           </a:solidFill>
           <a:ln>
             <a:noFill/>
@@ -3545,7 +3545,7 @@
             <a:r>
               <a:rPr sz="3000" b="1" i="0">
                 <a:solidFill>
-                  <a:srgbClr val="19294D"/>
+                  <a:srgbClr val="11285F"/>
                 </a:solidFill>
               </a:rPr>
               <a:t>가족 구성원</a:t>
@@ -3568,11 +3568,11 @@
             <a:avLst/>
           </a:prstGeom>
           <a:solidFill>
-            <a:srgbClr val="D0DAF1"/>
+            <a:srgbClr val="D1DDFA"/>
           </a:solidFill>
           <a:ln w="19050">
             <a:solidFill>
-              <a:srgbClr val="335299"/>
+              <a:srgbClr val="2655C5"/>
             </a:solidFill>
             <a:prstDash val="dash"/>
           </a:ln>
@@ -3591,7 +3591,7 @@
             <a:r>
               <a:rPr sz="1200" b="0" i="0">
                 <a:solidFill>
-                  <a:srgbClr val="19294D"/>
+                  <a:srgbClr val="11285F"/>
                 </a:solidFill>
               </a:rPr>
               <a:t>사진</a:t>
@@ -3629,7 +3629,7 @@
             <a:r>
               <a:rPr sz="1600" b="1" i="0">
                 <a:solidFill>
-                  <a:srgbClr val="19294D"/>
+                  <a:srgbClr val="11285F"/>
                 </a:solidFill>
               </a:rPr>
               <a:t>나</a:t>
@@ -3720,11 +3720,11 @@
             <a:avLst/>
           </a:prstGeom>
           <a:solidFill>
-            <a:srgbClr val="D0DAF1"/>
+            <a:srgbClr val="D1DDFA"/>
           </a:solidFill>
           <a:ln w="19050">
             <a:solidFill>
-              <a:srgbClr val="335299"/>
+              <a:srgbClr val="2655C5"/>
             </a:solidFill>
             <a:prstDash val="dash"/>
           </a:ln>
@@ -3743,7 +3743,7 @@
             <a:r>
               <a:rPr sz="1200" b="0" i="0">
                 <a:solidFill>
-                  <a:srgbClr val="19294D"/>
+                  <a:srgbClr val="11285F"/>
                 </a:solidFill>
               </a:rPr>
               <a:t>사진</a:t>
@@ -3781,7 +3781,7 @@
             <a:r>
               <a:rPr sz="1600" b="1" i="0">
                 <a:solidFill>
-                  <a:srgbClr val="19294D"/>
+                  <a:srgbClr val="11285F"/>
                 </a:solidFill>
               </a:rPr>
               <a:t>내 공간</a:t>
@@ -3872,11 +3872,11 @@
             <a:avLst/>
           </a:prstGeom>
           <a:solidFill>
-            <a:srgbClr val="D0DAF1"/>
+            <a:srgbClr val="D1DDFA"/>
           </a:solidFill>
           <a:ln w="19050">
             <a:solidFill>
-              <a:srgbClr val="335299"/>
+              <a:srgbClr val="2655C5"/>
             </a:solidFill>
             <a:prstDash val="dash"/>
           </a:ln>
@@ -3895,7 +3895,7 @@
             <a:r>
               <a:rPr sz="1200" b="0" i="0">
                 <a:solidFill>
-                  <a:srgbClr val="19294D"/>
+                  <a:srgbClr val="11285F"/>
                 </a:solidFill>
               </a:rPr>
               <a:t>사진</a:t>
@@ -3933,7 +3933,7 @@
             <a:r>
               <a:rPr sz="1600" b="1" i="0">
                 <a:solidFill>
-                  <a:srgbClr val="19294D"/>
+                  <a:srgbClr val="11285F"/>
                 </a:solidFill>
               </a:rPr>
               <a:t>내 하루</a:t>
@@ -4023,7 +4023,7 @@
     <p:bg>
       <p:bgPr>
         <a:solidFill>
-          <a:srgbClr val="F0F3FA"/>
+          <a:srgbClr val="EEF2FC"/>
         </a:solidFill>
         <a:effectLst/>
       </p:bgPr>
@@ -4050,7 +4050,7 @@
             <a:avLst/>
           </a:prstGeom>
           <a:solidFill>
-            <a:srgbClr val="335299"/>
+            <a:srgbClr val="2655C5"/>
           </a:solidFill>
           <a:ln>
             <a:noFill/>
@@ -4079,7 +4079,7 @@
             <a:avLst/>
           </a:prstGeom>
           <a:solidFill>
-            <a:srgbClr val="914C3B"/>
+            <a:srgbClr val="209DB6"/>
           </a:solidFill>
           <a:ln>
             <a:noFill/>
@@ -4123,7 +4123,7 @@
             <a:r>
               <a:rPr sz="3000" b="1" i="0">
                 <a:solidFill>
-                  <a:srgbClr val="19294D"/>
+                  <a:srgbClr val="11285F"/>
                 </a:solidFill>
               </a:rPr>
               <a:t>우리 가족 이야기</a:t>
@@ -4146,7 +4146,7 @@
             <a:avLst/>
           </a:prstGeom>
           <a:solidFill>
-            <a:srgbClr val="D0DAF1"/>
+            <a:srgbClr val="D1DDFA"/>
           </a:solidFill>
           <a:ln>
             <a:noFill/>
@@ -4175,7 +4175,7 @@
             <a:avLst/>
           </a:prstGeom>
           <a:solidFill>
-            <a:srgbClr val="335299"/>
+            <a:srgbClr val="2655C5"/>
           </a:solidFill>
           <a:ln w="38100">
             <a:solidFill>
@@ -4221,7 +4221,7 @@
             <a:r>
               <a:rPr sz="1600" b="1" i="0">
                 <a:solidFill>
-                  <a:srgbClr val="335299"/>
+                  <a:srgbClr val="2655C5"/>
                 </a:solidFill>
               </a:rPr>
               <a:t>태어난 곳</a:t>
@@ -4259,7 +4259,7 @@
             <a:r>
               <a:rPr sz="1800" b="1" i="0">
                 <a:solidFill>
-                  <a:srgbClr val="19294D"/>
+                  <a:srgbClr val="11285F"/>
                 </a:solidFill>
               </a:rPr>
               <a:t>나의 뿌리</a:t>
@@ -4320,7 +4320,7 @@
             <a:avLst/>
           </a:prstGeom>
           <a:solidFill>
-            <a:srgbClr val="335299"/>
+            <a:srgbClr val="2655C5"/>
           </a:solidFill>
           <a:ln w="38100">
             <a:solidFill>
@@ -4366,7 +4366,7 @@
             <a:r>
               <a:rPr sz="1600" b="1" i="0">
                 <a:solidFill>
-                  <a:srgbClr val="335299"/>
+                  <a:srgbClr val="2655C5"/>
                 </a:solidFill>
               </a:rPr>
               <a:t>학창 시절</a:t>
@@ -4404,7 +4404,7 @@
             <a:r>
               <a:rPr sz="1800" b="1" i="0">
                 <a:solidFill>
-                  <a:srgbClr val="19294D"/>
+                  <a:srgbClr val="11285F"/>
                 </a:solidFill>
               </a:rPr>
               <a:t>자라던 시간</a:t>
@@ -4465,7 +4465,7 @@
             <a:avLst/>
           </a:prstGeom>
           <a:solidFill>
-            <a:srgbClr val="335299"/>
+            <a:srgbClr val="2655C5"/>
           </a:solidFill>
           <a:ln w="38100">
             <a:solidFill>
@@ -4511,7 +4511,7 @@
             <a:r>
               <a:rPr sz="1600" b="1" i="0">
                 <a:solidFill>
-                  <a:srgbClr val="335299"/>
+                  <a:srgbClr val="2655C5"/>
                 </a:solidFill>
               </a:rPr>
               <a:t>혼자 시작한 날</a:t>
@@ -4549,7 +4549,7 @@
             <a:r>
               <a:rPr sz="1800" b="1" i="0">
                 <a:solidFill>
-                  <a:srgbClr val="19294D"/>
+                  <a:srgbClr val="11285F"/>
                 </a:solidFill>
               </a:rPr>
               <a:t>나의 첫 집</a:t>
@@ -4610,7 +4610,7 @@
             <a:avLst/>
           </a:prstGeom>
           <a:solidFill>
-            <a:srgbClr val="335299"/>
+            <a:srgbClr val="2655C5"/>
           </a:solidFill>
           <a:ln w="38100">
             <a:solidFill>
@@ -4656,7 +4656,7 @@
             <a:r>
               <a:rPr sz="1600" b="1" i="0">
                 <a:solidFill>
-                  <a:srgbClr val="335299"/>
+                  <a:srgbClr val="2655C5"/>
                 </a:solidFill>
               </a:rPr>
               <a:t>지금</a:t>
@@ -4694,7 +4694,7 @@
             <a:r>
               <a:rPr sz="1800" b="1" i="0">
                 <a:solidFill>
-                  <a:srgbClr val="19294D"/>
+                  <a:srgbClr val="11285F"/>
                 </a:solidFill>
               </a:rPr>
               <a:t>오늘의 나</a:t>
@@ -4754,7 +4754,7 @@
     <p:bg>
       <p:bgPr>
         <a:solidFill>
-          <a:srgbClr val="F0F3FA"/>
+          <a:srgbClr val="EEF2FC"/>
         </a:solidFill>
         <a:effectLst/>
       </p:bgPr>
@@ -4781,7 +4781,7 @@
             <a:avLst/>
           </a:prstGeom>
           <a:solidFill>
-            <a:srgbClr val="335299"/>
+            <a:srgbClr val="2655C5"/>
           </a:solidFill>
           <a:ln>
             <a:noFill/>
@@ -4810,7 +4810,7 @@
             <a:avLst/>
           </a:prstGeom>
           <a:solidFill>
-            <a:srgbClr val="914C3B"/>
+            <a:srgbClr val="209DB6"/>
           </a:solidFill>
           <a:ln>
             <a:noFill/>
@@ -4854,7 +4854,7 @@
             <a:r>
               <a:rPr sz="3000" b="1" i="0">
                 <a:solidFill>
-                  <a:srgbClr val="19294D"/>
+                  <a:srgbClr val="11285F"/>
                 </a:solidFill>
               </a:rPr>
               <a:t>우리 가족의 약속</a:t>
@@ -4879,11 +4879,11 @@
             </a:avLst>
           </a:prstGeom>
           <a:solidFill>
-            <a:srgbClr val="F0F3FA"/>
+            <a:srgbClr val="EEF2FC"/>
           </a:solidFill>
           <a:ln w="12700">
             <a:solidFill>
-              <a:srgbClr val="D0DAF1"/>
+              <a:srgbClr val="D1DDFA"/>
             </a:solidFill>
           </a:ln>
         </p:spPr>
@@ -4910,7 +4910,7 @@
             <a:avLst/>
           </a:prstGeom>
           <a:solidFill>
-            <a:srgbClr val="335299"/>
+            <a:srgbClr val="2655C5"/>
           </a:solidFill>
           <a:ln>
             <a:noFill/>
@@ -4968,7 +4968,7 @@
             <a:r>
               <a:rPr sz="1800" b="1" i="0">
                 <a:solidFill>
-                  <a:srgbClr val="19294D"/>
+                  <a:srgbClr val="11285F"/>
                 </a:solidFill>
               </a:rPr>
               <a:t>약속 1</a:t>
@@ -5031,11 +5031,11 @@
             </a:avLst>
           </a:prstGeom>
           <a:solidFill>
-            <a:srgbClr val="F0F3FA"/>
+            <a:srgbClr val="EEF2FC"/>
           </a:solidFill>
           <a:ln w="12700">
             <a:solidFill>
-              <a:srgbClr val="D0DAF1"/>
+              <a:srgbClr val="D1DDFA"/>
             </a:solidFill>
           </a:ln>
         </p:spPr>
@@ -5062,7 +5062,7 @@
             <a:avLst/>
           </a:prstGeom>
           <a:solidFill>
-            <a:srgbClr val="335299"/>
+            <a:srgbClr val="2655C5"/>
           </a:solidFill>
           <a:ln>
             <a:noFill/>
@@ -5120,7 +5120,7 @@
             <a:r>
               <a:rPr sz="1800" b="1" i="0">
                 <a:solidFill>
-                  <a:srgbClr val="19294D"/>
+                  <a:srgbClr val="11285F"/>
                 </a:solidFill>
               </a:rPr>
               <a:t>약속 2</a:t>
@@ -5183,11 +5183,11 @@
             </a:avLst>
           </a:prstGeom>
           <a:solidFill>
-            <a:srgbClr val="F0F3FA"/>
+            <a:srgbClr val="EEF2FC"/>
           </a:solidFill>
           <a:ln w="12700">
             <a:solidFill>
-              <a:srgbClr val="D0DAF1"/>
+              <a:srgbClr val="D1DDFA"/>
             </a:solidFill>
           </a:ln>
         </p:spPr>
@@ -5214,7 +5214,7 @@
             <a:avLst/>
           </a:prstGeom>
           <a:solidFill>
-            <a:srgbClr val="335299"/>
+            <a:srgbClr val="2655C5"/>
           </a:solidFill>
           <a:ln>
             <a:noFill/>
@@ -5272,7 +5272,7 @@
             <a:r>
               <a:rPr sz="1800" b="1" i="0">
                 <a:solidFill>
-                  <a:srgbClr val="19294D"/>
+                  <a:srgbClr val="11285F"/>
                 </a:solidFill>
               </a:rPr>
               <a:t>약속 3</a:t>
@@ -5332,7 +5332,7 @@
     <p:bg>
       <p:bgPr>
         <a:solidFill>
-          <a:srgbClr val="F0F3FA"/>
+          <a:srgbClr val="EEF2FC"/>
         </a:solidFill>
         <a:effectLst/>
       </p:bgPr>
@@ -5359,7 +5359,7 @@
             <a:avLst/>
           </a:prstGeom>
           <a:solidFill>
-            <a:srgbClr val="335299"/>
+            <a:srgbClr val="2655C5"/>
           </a:solidFill>
           <a:ln>
             <a:noFill/>
@@ -5388,7 +5388,7 @@
             <a:avLst/>
           </a:prstGeom>
           <a:solidFill>
-            <a:srgbClr val="914C3B"/>
+            <a:srgbClr val="209DB6"/>
           </a:solidFill>
           <a:ln>
             <a:noFill/>
@@ -5432,7 +5432,7 @@
             <a:r>
               <a:rPr sz="3000" b="1" i="0">
                 <a:solidFill>
-                  <a:srgbClr val="19294D"/>
+                  <a:srgbClr val="11285F"/>
                 </a:solidFill>
               </a:rPr>
               <a:t>가족 사진</a:t>
@@ -5457,11 +5457,11 @@
             </a:avLst>
           </a:prstGeom>
           <a:solidFill>
-            <a:srgbClr val="D0DAF1"/>
+            <a:srgbClr val="D1DDFA"/>
           </a:solidFill>
           <a:ln w="19050">
             <a:solidFill>
-              <a:srgbClr val="335299"/>
+              <a:srgbClr val="2655C5"/>
             </a:solidFill>
             <a:prstDash val="dash"/>
           </a:ln>
@@ -5480,7 +5480,7 @@
             <a:r>
               <a:rPr sz="1200" b="0" i="0">
                 <a:solidFill>
-                  <a:srgbClr val="19294D"/>
+                  <a:srgbClr val="11285F"/>
                 </a:solidFill>
               </a:rPr>
               <a:t>사진 1</a:t>
@@ -5505,11 +5505,11 @@
             </a:avLst>
           </a:prstGeom>
           <a:solidFill>
-            <a:srgbClr val="D0DAF1"/>
+            <a:srgbClr val="D1DDFA"/>
           </a:solidFill>
           <a:ln w="19050">
             <a:solidFill>
-              <a:srgbClr val="335299"/>
+              <a:srgbClr val="2655C5"/>
             </a:solidFill>
             <a:prstDash val="dash"/>
           </a:ln>
@@ -5528,7 +5528,7 @@
             <a:r>
               <a:rPr sz="1200" b="0" i="0">
                 <a:solidFill>
-                  <a:srgbClr val="19294D"/>
+                  <a:srgbClr val="11285F"/>
                 </a:solidFill>
               </a:rPr>
               <a:t>사진 2</a:t>
@@ -5553,11 +5553,11 @@
             </a:avLst>
           </a:prstGeom>
           <a:solidFill>
-            <a:srgbClr val="D0DAF1"/>
+            <a:srgbClr val="D1DDFA"/>
           </a:solidFill>
           <a:ln w="19050">
             <a:solidFill>
-              <a:srgbClr val="335299"/>
+              <a:srgbClr val="2655C5"/>
             </a:solidFill>
             <a:prstDash val="dash"/>
           </a:ln>
@@ -5576,7 +5576,7 @@
             <a:r>
               <a:rPr sz="1200" b="0" i="0">
                 <a:solidFill>
-                  <a:srgbClr val="19294D"/>
+                  <a:srgbClr val="11285F"/>
                 </a:solidFill>
               </a:rPr>
               <a:t>사진 3</a:t>
@@ -5601,11 +5601,11 @@
             </a:avLst>
           </a:prstGeom>
           <a:solidFill>
-            <a:srgbClr val="D0DAF1"/>
+            <a:srgbClr val="D1DDFA"/>
           </a:solidFill>
           <a:ln w="19050">
             <a:solidFill>
-              <a:srgbClr val="335299"/>
+              <a:srgbClr val="2655C5"/>
             </a:solidFill>
             <a:prstDash val="dash"/>
           </a:ln>
@@ -5624,7 +5624,7 @@
             <a:r>
               <a:rPr sz="1200" b="0" i="0">
                 <a:solidFill>
-                  <a:srgbClr val="19294D"/>
+                  <a:srgbClr val="11285F"/>
                 </a:solidFill>
               </a:rPr>
               <a:t>사진 4</a:t>
@@ -5649,11 +5649,11 @@
             </a:avLst>
           </a:prstGeom>
           <a:solidFill>
-            <a:srgbClr val="D0DAF1"/>
+            <a:srgbClr val="D1DDFA"/>
           </a:solidFill>
           <a:ln w="19050">
             <a:solidFill>
-              <a:srgbClr val="335299"/>
+              <a:srgbClr val="2655C5"/>
             </a:solidFill>
             <a:prstDash val="dash"/>
           </a:ln>
@@ -5672,7 +5672,7 @@
             <a:r>
               <a:rPr sz="1200" b="0" i="0">
                 <a:solidFill>
-                  <a:srgbClr val="19294D"/>
+                  <a:srgbClr val="11285F"/>
                 </a:solidFill>
               </a:rPr>
               <a:t>사진 5</a:t>
@@ -5697,11 +5697,11 @@
             </a:avLst>
           </a:prstGeom>
           <a:solidFill>
-            <a:srgbClr val="D0DAF1"/>
+            <a:srgbClr val="D1DDFA"/>
           </a:solidFill>
           <a:ln w="19050">
             <a:solidFill>
-              <a:srgbClr val="335299"/>
+              <a:srgbClr val="2655C5"/>
             </a:solidFill>
             <a:prstDash val="dash"/>
           </a:ln>
@@ -5720,7 +5720,7 @@
             <a:r>
               <a:rPr sz="1200" b="0" i="0">
                 <a:solidFill>
-                  <a:srgbClr val="19294D"/>
+                  <a:srgbClr val="11285F"/>
                 </a:solidFill>
               </a:rPr>
               <a:t>사진 6</a:t>
@@ -5800,7 +5800,7 @@
             <a:r>
               <a:rPr sz="3600" b="1" i="0">
                 <a:solidFill>
-                  <a:srgbClr val="19294D"/>
+                  <a:srgbClr val="11285F"/>
                 </a:solidFill>
               </a:rPr>
               <a:t>우리 가족 소개를 마칩니다</a:t>
@@ -5838,7 +5838,7 @@
             <a:r>
               <a:rPr sz="1700" b="0" i="1">
                 <a:solidFill>
-                  <a:srgbClr val="19294D"/>
+                  <a:srgbClr val="11285F"/>
                 </a:solidFill>
               </a:rPr>
               <a:t>읽어 주셔서 고맙습니다</a:t>
@@ -5903,34 +5903,34 @@
         <a:sysClr val="window" lastClr="FFFFFF"/>
       </a:lt1>
       <a:dk2>
-        <a:srgbClr val="19294D"/>
+        <a:srgbClr val="11285F"/>
       </a:dk2>
       <a:lt2>
-        <a:srgbClr val="F0F3FA"/>
+        <a:srgbClr val="EEF2FC"/>
       </a:lt2>
       <a:accent1>
-        <a:srgbClr val="335299"/>
+        <a:srgbClr val="2655C5"/>
       </a:accent1>
       <a:accent2>
-        <a:srgbClr val="914C3B"/>
+        <a:srgbClr val="209DB6"/>
       </a:accent2>
       <a:accent3>
-        <a:srgbClr val="19294D"/>
+        <a:srgbClr val="11285F"/>
       </a:accent3>
       <a:accent4>
-        <a:srgbClr val="D0DAF1"/>
+        <a:srgbClr val="D1DDFA"/>
       </a:accent4>
       <a:accent5>
-        <a:srgbClr val="624F6A"/>
+        <a:srgbClr val="2379BE"/>
       </a:accent5>
       <a:accent6>
-        <a:srgbClr val="757F94"/>
+        <a:srgbClr val="707E9F"/>
       </a:accent6>
       <a:hlink>
-        <a:srgbClr val="335299"/>
+        <a:srgbClr val="2655C5"/>
       </a:hlink>
       <a:folHlink>
-        <a:srgbClr val="19294D"/>
+        <a:srgbClr val="11285F"/>
       </a:folHlink>
     </a:clrScheme>
     <a:fontScheme name="Office">
